--- a/modulo-01/01.06 - Trabalhando com Tabelas Internas Complexas/01.06_ABAP_Moderno_Tabelas_Internas_Complexas.pptx
+++ b/modulo-01/01.06 - Trabalhando com Tabelas Internas Complexas/01.06_ABAP_Moderno_Tabelas_Internas_Complexas.pptx
@@ -10077,7 +10077,7 @@
         </p:blipFill>
         <p:spPr>
           <a:xfrm>
-            <a:off x="6355080" y="1965960"/>
+            <a:off x="822960" y="1965960"/>
             <a:ext cx="256032" cy="256032"/>
           </a:xfrm>
           <a:prstGeom prst="rect">
@@ -10101,7 +10101,7 @@
         </p:blipFill>
         <p:spPr>
           <a:xfrm>
-            <a:off x="822960" y="1965960"/>
+            <a:off x="822960" y="2926080"/>
             <a:ext cx="256032" cy="256032"/>
           </a:xfrm>
           <a:prstGeom prst="rect">
@@ -10125,7 +10125,7 @@
         </p:blipFill>
         <p:spPr>
           <a:xfrm>
-            <a:off x="822960" y="2926080"/>
+            <a:off x="6355080" y="1965960"/>
             <a:ext cx="256032" cy="256032"/>
           </a:xfrm>
           <a:prstGeom prst="rect">
@@ -11838,7 +11838,7 @@
         </p:blipFill>
         <p:spPr>
           <a:xfrm>
-            <a:off x="11094415" y="1847088"/>
+            <a:off x="5455768" y="3858768"/>
             <a:ext cx="347472" cy="347472"/>
           </a:xfrm>
           <a:prstGeom prst="rect">
@@ -11862,7 +11862,7 @@
         </p:blipFill>
         <p:spPr>
           <a:xfrm>
-            <a:off x="5455768" y="3858768"/>
+            <a:off x="11094415" y="1847088"/>
             <a:ext cx="347472" cy="347472"/>
           </a:xfrm>
           <a:prstGeom prst="rect">
@@ -12771,7 +12771,7 @@
         </p:blipFill>
         <p:spPr>
           <a:xfrm>
-            <a:off x="850392" y="4325112"/>
+            <a:off x="6511900" y="2209800"/>
             <a:ext cx="256032" cy="256032"/>
           </a:xfrm>
           <a:prstGeom prst="rect">
@@ -12795,7 +12795,7 @@
         </p:blipFill>
         <p:spPr>
           <a:xfrm>
-            <a:off x="6511900" y="2209800"/>
+            <a:off x="850392" y="4325112"/>
             <a:ext cx="256032" cy="256032"/>
           </a:xfrm>
           <a:prstGeom prst="rect">
